--- a/public/fun/pack/pptx/talkpro/발표템플릿프리미엄_26_사업제안_버건디샴페인.pptx
+++ b/public/fun/pack/pptx/talkpro/발표템플릿프리미엄_26_사업제안_버건디샴페인.pptx
@@ -115,12 +115,12 @@
   <p:extLst>
     <p:ext uri="{521415D9-36F7-43E2-AB2F-B90AF26B5E84}">
       <p14:sectionLst xmlns:p14="http://schemas.microsoft.com/office/powerpoint/2010/main">
-        <p14:section name="시작" id="{5F95ABE1-4F49-4AE0-8413-372A13F64684}">
+        <p14:section name="시작" id="{EE571051-EE6B-4163-A299-CC3CB8F9CA6B}">
           <p14:sldIdLst>
             <p14:sldId id="256"/>
           </p14:sldIdLst>
         </p14:section>
-        <p14:section name="본문" id="{83557345-1E22-4617-A591-DFC335329351}">
+        <p14:section name="본문" id="{28744D65-4F99-4796-B7C6-68CCFF9C3B62}">
           <p14:sldIdLst>
             <p14:sldId id="257"/>
             <p14:sldId id="258"/>
@@ -131,7 +131,7 @@
             <p14:sldId id="263"/>
           </p14:sldIdLst>
         </p14:section>
-        <p14:section name="마무리" id="{8D517FAD-18AA-4F07-957C-C06FB30695D5}">
+        <p14:section name="마무리" id="{9891AEA0-3118-4408-8125-EBC8340C2B4C}">
           <p14:sldIdLst>
             <p14:sldId id="264"/>
           </p14:sldIdLst>
@@ -2028,7 +2028,7 @@
             </a:lvl1pPr>
           </a:lstStyle>
           <a:p>
-            <a:fld id="{D273E6C3-2B67-4706-89E5-0028E98A9659}" type="slidenum">
+            <a:fld id="{F23C27A9-A0D3-4544-863C-1F6098F3E7B6}" type="slidenum">
               <a:rPr lang="en-US"/>
               <a:t>‹#›</a:t>
             </a:fld>
@@ -3154,7 +3154,7 @@
             </a:lvl1pPr>
           </a:lstStyle>
           <a:p>
-            <a:fld id="{C60E235F-C7CD-47C1-B40E-80A5DC9F83DE}" type="slidenum">
+            <a:fld id="{CB67C670-39F2-4706-8E1D-8742DCDEFDDF}" type="slidenum">
               <a:rPr lang="en-US"/>
               <a:t>‹#›</a:t>
             </a:fld>
@@ -4164,7 +4164,7 @@
             </a:lvl1pPr>
           </a:lstStyle>
           <a:p>
-            <a:fld id="{57E3AC68-FC05-4479-962F-3F1BB2B9F2ED}" type="slidenum">
+            <a:fld id="{8E20DBD9-B3F7-4D11-8773-B1283114650A}" type="slidenum">
               <a:rPr lang="en-US"/>
               <a:t>‹#›</a:t>
             </a:fld>
@@ -5305,7 +5305,7 @@
           <a:p>
             <a:r>
               <a:rPr lang="ko-KR"/>
-              <a:t>하반기 마무리 전에 결정할 안건입니다</a:t>
+              <a:t>마무리 전에 결정할 안건입니다</a:t>
             </a:r>
           </a:p>
         </p:txBody>
@@ -5333,7 +5333,7 @@
           <a:p>
             <a:r>
               <a:rPr lang="ko-KR"/>
-              <a:t>0000. 00. 00</a:t>
+              <a:t>날짜 입력</a:t>
             </a:r>
           </a:p>
         </p:txBody>
@@ -5418,7 +5418,7 @@
           <a:bodyPr/>
           <a:lstStyle/>
           <a:p>
-            <a:fld id="{BB2FD187-DC5C-4893-B4FC-F51FA5777A5A}" type="slidenum">
+            <a:fld id="{9831EEB2-7D42-4E24-A6DE-B2AF48073833}" type="slidenum">
               <a:rPr lang="en-US"/>
               <a:t>‹#›</a:t>
             </a:fld>
@@ -6532,7 +6532,7 @@
           <a:bodyPr/>
           <a:lstStyle/>
           <a:p>
-            <a:fld id="{5C902D31-8E63-4048-A89F-D6E828CCA7D0}" type="slidenum">
+            <a:fld id="{C6066F8C-BA6B-42FA-B74E-FBD51EFB1871}" type="slidenum">
               <a:rPr lang="en-US"/>
               <a:t>‹#›</a:t>
             </a:fld>
@@ -6620,7 +6620,7 @@
           <a:bodyPr/>
           <a:lstStyle/>
           <a:p>
-            <a:fld id="{4E194A5A-FB67-4CE2-A57A-AE866605CBDD}" type="slidenum">
+            <a:fld id="{25416A7D-407F-4B2B-8874-60B489905822}" type="slidenum">
               <a:rPr lang="en-US"/>
               <a:t>‹#›</a:t>
             </a:fld>
@@ -7527,7 +7527,7 @@
           <a:bodyPr/>
           <a:lstStyle/>
           <a:p>
-            <a:fld id="{95B78688-D584-4308-8BE7-7AABE19BA0D8}" type="slidenum">
+            <a:fld id="{7D5ECE10-2AB4-455D-8C82-266A5DFA8185}" type="slidenum">
               <a:rPr lang="en-US"/>
               <a:t>‹#›</a:t>
             </a:fld>
@@ -8131,7 +8131,7 @@
           <a:bodyPr/>
           <a:lstStyle/>
           <a:p>
-            <a:fld id="{B8305E0C-6935-4810-BE86-CA915105B579}" type="slidenum">
+            <a:fld id="{C7588213-CE6B-4CA1-8AEB-ED29825F6E37}" type="slidenum">
               <a:rPr lang="en-US"/>
               <a:t>‹#›</a:t>
             </a:fld>
@@ -8314,7 +8314,7 @@
           <a:bodyPr/>
           <a:lstStyle/>
           <a:p>
-            <a:fld id="{E30B2F88-77F5-41D1-83C4-FA64AF9FC21E}" type="slidenum">
+            <a:fld id="{DCE207BE-8339-4A39-BFB9-C1F96728C58C}" type="slidenum">
               <a:rPr lang="en-US"/>
               <a:t>‹#›</a:t>
             </a:fld>
@@ -9378,7 +9378,7 @@
           <a:bodyPr/>
           <a:lstStyle/>
           <a:p>
-            <a:fld id="{5C0E5CA1-00A3-4E5A-B0AC-1AE59634BAD0}" type="slidenum">
+            <a:fld id="{DEEDE036-A2D6-42D7-A065-014DF353FEEF}" type="slidenum">
               <a:rPr lang="en-US"/>
               <a:t>‹#›</a:t>
             </a:fld>
